--- a/docs/posts/2023/Lifestyle/QuartoBasics.pptx
+++ b/docs/posts/2023/Lifestyle/QuartoBasics.pptx
@@ -3247,7 +3247,7 @@
             </a:pPr>
             <a:r>
               <a:rPr/>
-              <a:t>1 使い方の概要</a:t>
+              <a:t>1. 使い方の概要</a:t>
             </a:r>
           </a:p>
         </p:txBody>
@@ -4747,7 +4747,7 @@
             </a:pPr>
             <a:r>
               <a:rPr/>
-              <a:t>2 Website の作り方</a:t>
+              <a:t>2. Website の作り方</a:t>
             </a:r>
           </a:p>
         </p:txBody>
@@ -6212,7 +6212,7 @@
             </a:pPr>
             <a:r>
               <a:rPr/>
-              <a:t>3 PDF の作り方</a:t>
+              <a:t>3. PDF の作り方</a:t>
             </a:r>
           </a:p>
         </p:txBody>
@@ -7239,7 +7239,7 @@
             </a:pPr>
             <a:r>
               <a:rPr/>
-              <a:t>4 スライドの作り方</a:t>
+              <a:t>4. スライドの作り方</a:t>
             </a:r>
           </a:p>
         </p:txBody>
